--- a/decks/englang-rhetoric/englang-rhetoric_ch4_pathos-and-analysis.pptx
+++ b/decks/englang-rhetoric/englang-rhetoric_ch4_pathos-and-analysis.pptx
@@ -126,29 +126,29 @@
   <p:extLst>
     <p:ext uri="{521415D9-36F7-43E2-AB2F-B90AF26B5E84}">
       <p14:sectionLst xmlns:p14="http://schemas.microsoft.com/office/powerpoint/2010/main">
-        <p14:section name="Opening" id="{220bc4c7-089e-b3f7-4f16-f72832780402}">
+        <p14:section name="Opening" id="{4e8ce541-0bd3-1f04-a1c0-3aea4507bdc1}">
           <p14:sldIdLst>
             <p14:sldId id="256"/>
           </p14:sldIdLst>
         </p14:section>
-        <p14:section name="Gate" id="{039c3854-df75-1db1-9004-0ab5499f9abc}">
+        <p14:section name="Gate" id="{46e5c061-da0c-b0b7-ca2f-6a9c70e1a987}">
           <p14:sldIdLst>
             <p14:sldId id="257"/>
             <p14:sldId id="258"/>
           </p14:sldIdLst>
         </p14:section>
-        <p14:section name="Pre-teach" id="{c6ed4be5-a4d8-a771-c330-20d671762b08}">
+        <p14:section name="Pre-teach" id="{975973dc-a680-4080-301a-46eb5e45362a}">
           <p14:sldIdLst>
             <p14:sldId id="259"/>
           </p14:sldIdLst>
         </p14:section>
-        <p14:section name="Read-along" id="{5f0484f6-264f-1675-20c1-1b4f75666b25}">
+        <p14:section name="Read-along" id="{7ac8c26d-6e6c-bc4e-37f1-3eb61c57fe1d}">
           <p14:sldIdLst>
             <p14:sldId id="260"/>
             <p14:sldId id="261"/>
           </p14:sldIdLst>
         </p14:section>
-        <p14:section name="Teach" id="{e76e4f79-6d15-c36c-3872-3f2b77385761}">
+        <p14:section name="Teach" id="{c587b81e-df07-e48d-f918-e8b3e06c1c19}">
           <p14:sldIdLst>
             <p14:sldId id="262"/>
             <p14:sldId id="263"/>
@@ -158,7 +158,7 @@
             <p14:sldId id="267"/>
           </p14:sldIdLst>
         </p14:section>
-        <p14:section name="Routes" id="{af1b2165-2fd3-bf15-d496-161b7eaef0d9}">
+        <p14:section name="Routes" id="{5ea6fe54-4210-1258-529c-1d22f061c78a}">
           <p14:sldIdLst>
             <p14:sldId id="268"/>
             <p14:sldId id="269"/>
@@ -166,12 +166,12 @@
             <p14:sldId id="271"/>
           </p14:sldIdLst>
         </p14:section>
-        <p14:section name="Close" id="{2a69aa9e-7e77-5dcb-7b68-6f82cbd5ef29}">
+        <p14:section name="Close" id="{00b9346e-aa5a-4424-e4c3-a0ce5f662ff3}">
           <p14:sldIdLst>
             <p14:sldId id="272"/>
           </p14:sldIdLst>
         </p14:section>
-        <p14:section name="Answers" id="{9d28b6c0-7a14-710a-a11d-c316676f3a2a}">
+        <p14:section name="Answers" id="{3ea80fde-8a4c-e347-a2e4-2b647e017d8a}">
           <p14:sldIdLst>
             <p14:sldId id="273"/>
             <p14:sldId id="274"/>
@@ -1327,7 +1327,7 @@
               <a:rPr lang="en-US" dirty="0"/>
               <a:t>Exit ticket — individual, silent, on a slip or mini-whiteboard. Recall before help: no notes, no lanes, no hints. Collect before pupils leave.
 Question: Pathos appeals to the audience’s…
-Answer: D   emotions and values. Pathos is persuasion through emotion and values.
+Answer: B   emotions and values. Pathos is persuasion through emotion and values.
 Source of this question: gate item 1 re-asked (options rotated) — this chapter has no third quick-check module.
 The ebook also holds task 3, "What, How, Why paragraph", for homework or the next lesson's do now.
 Sort the slips: correct → ready to move on; incorrect → start next lesson in the pre-teach group, with the read-along and the Support lane. Same destination next time.</a:t>
@@ -1601,8 +1601,8 @@
             <a:r>
               <a:rPr lang="en-US" dirty="0"/>
               <a:t>Do now — retrieval. Silent, no notes, no help: recall comes before any support. Give about four minutes.
-1. Pathos appeals to the audience’s…  →  A   emotions and values
-2. In which year did Martin Luther King give his most famous speech in Washington?  →  B   1963
+1. Pathos appeals to the audience’s…  →  C   emotions and values
+2. In which year did Martin Luther King give his most famous speech in Washington?  →  C   1963
 3. To analyse a speech, ask what the speaker is saying, ___ they are saying it, and why.  →  how
 Circulate: who gets 3/3 (Stretch route), 2/3 (Core), 0–1 (Support)? Use this to route pupils later in the lesson.</a:t>
             </a:r>
@@ -1693,7 +1693,7 @@
             <a:r>
               <a:rPr lang="en-US" dirty="0"/>
               <a:t>Answers — exit ticket: Exit ticket. Reveal the answer; pupils mark their own work in a different colour, then read the "why" together. Same destination for every lane, so one answer serves the whole class.
-Answer: D   emotions and values
+Answer: B   emotions and values
 Why: Pathos is persuasion through emotion and values.
 Ask a Support pupil to explain one step, and a Stretch pupil to share their extension.</a:t>
             </a:r>
@@ -1784,8 +1784,8 @@
             <a:r>
               <a:rPr lang="en-US" dirty="0"/>
               <a:t>Answers — pupils mark their own in a different colour, then hands up for 3/3, 2/3, 1/3.
-1. A   emotions and values. Pathos is persuasion through emotion and values.
-2. B   1963. The speech was delivered in Washington in 1963. King was assassinated on 4 April 1968.
+1. C   emotions and values. Pathos is persuasion through emotion and values.
+2. C   1963. The speech was delivered in Washington in 1963. King was assassinated on 4 April 1968.
 3. how. What (the point), How (quotation and method), Why (effect and aim).
 Say the route each score points to: 3/3 Stretch, 2/3 Core, 0–1 Support. Pupils may choose to move up.</a:t>
             </a:r>
@@ -10432,7 +10432,7 @@
                 <a:ea typeface="Calibri" pitchFamily="34" charset="-122"/>
                 <a:cs typeface="Calibri" pitchFamily="34" charset="-120"/>
               </a:rPr>
-              <a:t>trust in the speaker</a:t>
+              <a:t>emotions and values</a:t>
             </a:r>
             <a:endParaRPr lang="en-US" sz="2400" dirty="0"/>
           </a:p>
@@ -10469,7 +10469,7 @@
                 <a:ea typeface="Calibri" pitchFamily="34" charset="-122"/>
                 <a:cs typeface="Calibri" pitchFamily="34" charset="-120"/>
               </a:rPr>
-              <a:t>knowledge of history</a:t>
+              <a:t>trust in the speaker</a:t>
             </a:r>
             <a:endParaRPr lang="en-US" sz="2400" dirty="0"/>
           </a:p>
@@ -10506,7 +10506,7 @@
                 <a:ea typeface="Calibri" pitchFamily="34" charset="-122"/>
                 <a:cs typeface="Calibri" pitchFamily="34" charset="-120"/>
               </a:rPr>
-              <a:t>emotions and values</a:t>
+              <a:t>knowledge of history</a:t>
             </a:r>
             <a:endParaRPr lang="en-US" sz="2400" dirty="0"/>
           </a:p>
@@ -12163,7 +12163,7 @@
                 <a:ea typeface="Calibri" pitchFamily="34" charset="-122"/>
                 <a:cs typeface="Calibri" pitchFamily="34" charset="-120"/>
               </a:rPr>
-              <a:t>emotions and values</a:t>
+              <a:t>knowledge of history</a:t>
             </a:r>
             <a:endParaRPr lang="en-US" sz="2400" dirty="0"/>
           </a:p>
@@ -12237,7 +12237,7 @@
                 <a:ea typeface="Calibri" pitchFamily="34" charset="-122"/>
                 <a:cs typeface="Calibri" pitchFamily="34" charset="-120"/>
               </a:rPr>
-              <a:t>trust in the speaker</a:t>
+              <a:t>emotions and values</a:t>
             </a:r>
             <a:endParaRPr lang="en-US" sz="2400" dirty="0"/>
           </a:p>
@@ -12274,7 +12274,7 @@
                 <a:ea typeface="Calibri" pitchFamily="34" charset="-122"/>
                 <a:cs typeface="Calibri" pitchFamily="34" charset="-120"/>
               </a:rPr>
-              <a:t>knowledge of history</a:t>
+              <a:t>trust in the speaker</a:t>
             </a:r>
             <a:endParaRPr lang="en-US" sz="2400" dirty="0"/>
           </a:p>
@@ -12515,7 +12515,7 @@
                 <a:ea typeface="Calibri" pitchFamily="34" charset="-122"/>
                 <a:cs typeface="Calibri" pitchFamily="34" charset="-120"/>
               </a:rPr>
-              <a:t>1963</a:t>
+              <a:t>1975</a:t>
             </a:r>
             <a:endParaRPr lang="en-US" sz="2200" dirty="0"/>
           </a:p>
@@ -12552,7 +12552,7 @@
                 <a:ea typeface="Calibri" pitchFamily="34" charset="-122"/>
                 <a:cs typeface="Calibri" pitchFamily="34" charset="-120"/>
               </a:rPr>
-              <a:t>1968</a:t>
+              <a:t>1963</a:t>
             </a:r>
             <a:endParaRPr lang="en-US" sz="2200" dirty="0"/>
           </a:p>
@@ -12589,7 +12589,7 @@
                 <a:ea typeface="Calibri" pitchFamily="34" charset="-122"/>
                 <a:cs typeface="Calibri" pitchFamily="34" charset="-120"/>
               </a:rPr>
-              <a:t>1975</a:t>
+              <a:t>1968</a:t>
             </a:r>
             <a:endParaRPr lang="en-US" sz="2200" dirty="0"/>
           </a:p>
@@ -13126,7 +13126,7 @@
                 <a:ea typeface="Cambria" pitchFamily="34" charset="-122"/>
                 <a:cs typeface="Cambria" pitchFamily="34" charset="-120"/>
               </a:rPr>
-              <a:t>D   emotions and values</a:t>
+              <a:t>B   emotions and values</a:t>
             </a:r>
             <a:endParaRPr lang="en-US" sz="1800" dirty="0"/>
           </a:p>
@@ -13647,7 +13647,7 @@
                 <a:ea typeface="Calibri" pitchFamily="34" charset="-122"/>
                 <a:cs typeface="Calibri" pitchFamily="34" charset="-120"/>
               </a:rPr>
-              <a:t>A   emotions and values</a:t>
+              <a:t>C   emotions and values</a:t>
             </a:r>
             <a:endParaRPr lang="en-US" sz="2200" dirty="0"/>
           </a:p>
@@ -13897,7 +13897,7 @@
                 <a:ea typeface="Calibri" pitchFamily="34" charset="-122"/>
                 <a:cs typeface="Calibri" pitchFamily="34" charset="-120"/>
               </a:rPr>
-              <a:t>B   1963</a:t>
+              <a:t>C   1963</a:t>
             </a:r>
             <a:endParaRPr lang="en-US" sz="2200" dirty="0"/>
           </a:p>

--- a/decks/englang-rhetoric/englang-rhetoric_ch4_pathos-and-analysis.pptx
+++ b/decks/englang-rhetoric/englang-rhetoric_ch4_pathos-and-analysis.pptx
@@ -126,29 +126,29 @@
   <p:extLst>
     <p:ext uri="{521415D9-36F7-43E2-AB2F-B90AF26B5E84}">
       <p14:sectionLst xmlns:p14="http://schemas.microsoft.com/office/powerpoint/2010/main">
-        <p14:section name="Opening" id="{4e8ce541-0bd3-1f04-a1c0-3aea4507bdc1}">
+        <p14:section name="Opening" id="{5f69900e-622e-5d76-8147-8b2056ba6aa7}">
           <p14:sldIdLst>
             <p14:sldId id="256"/>
           </p14:sldIdLst>
         </p14:section>
-        <p14:section name="Gate" id="{46e5c061-da0c-b0b7-ca2f-6a9c70e1a987}">
+        <p14:section name="Gate" id="{b29e27ad-7835-7740-03d4-6d76eec05dab}">
           <p14:sldIdLst>
             <p14:sldId id="257"/>
             <p14:sldId id="258"/>
           </p14:sldIdLst>
         </p14:section>
-        <p14:section name="Pre-teach" id="{975973dc-a680-4080-301a-46eb5e45362a}">
+        <p14:section name="Pre-teach" id="{402b3bec-5055-b79f-efa7-9103fb787e95}">
           <p14:sldIdLst>
             <p14:sldId id="259"/>
           </p14:sldIdLst>
         </p14:section>
-        <p14:section name="Read-along" id="{7ac8c26d-6e6c-bc4e-37f1-3eb61c57fe1d}">
+        <p14:section name="Read-along" id="{85fe4b73-c1ce-5eb7-aefb-ea9d59919074}">
           <p14:sldIdLst>
             <p14:sldId id="260"/>
             <p14:sldId id="261"/>
           </p14:sldIdLst>
         </p14:section>
-        <p14:section name="Teach" id="{c587b81e-df07-e48d-f918-e8b3e06c1c19}">
+        <p14:section name="Teach" id="{225a1e25-a4a2-f7fe-c5f9-00158f32030d}">
           <p14:sldIdLst>
             <p14:sldId id="262"/>
             <p14:sldId id="263"/>
@@ -158,7 +158,7 @@
             <p14:sldId id="267"/>
           </p14:sldIdLst>
         </p14:section>
-        <p14:section name="Routes" id="{5ea6fe54-4210-1258-529c-1d22f061c78a}">
+        <p14:section name="Routes" id="{b15708e9-0d61-1b19-0235-d6f91b97951d}">
           <p14:sldIdLst>
             <p14:sldId id="268"/>
             <p14:sldId id="269"/>
@@ -166,12 +166,12 @@
             <p14:sldId id="271"/>
           </p14:sldIdLst>
         </p14:section>
-        <p14:section name="Close" id="{00b9346e-aa5a-4424-e4c3-a0ce5f662ff3}">
+        <p14:section name="Close" id="{1ddddbe8-133f-98e0-e2a4-b90bf8d544d9}">
           <p14:sldIdLst>
             <p14:sldId id="272"/>
           </p14:sldIdLst>
         </p14:section>
-        <p14:section name="Answers" id="{3ea80fde-8a4c-e347-a2e4-2b647e017d8a}">
+        <p14:section name="Answers" id="{8bd5ebeb-dc4e-29bf-69a1-9a2f90287ad2}">
           <p14:sldIdLst>
             <p14:sldId id="273"/>
             <p14:sldId id="274"/>
